--- a/modulo-01/01.03 - Trabalhando com Classes Locais e Orientação a Objetos/01.03_Trabalhando_com_Classes_Locais_OO_no_ABAP.pptx
+++ b/modulo-01/01.03 - Trabalhando com Classes Locais e Orientação a Objetos/01.03_Trabalhando_com_Classes_Locais_OO_no_ABAP.pptx
@@ -10227,7 +10227,7 @@
         </p:nvSpPr>
         <p:spPr>
           <a:xfrm>
-            <a:off x="548640" y="1645920"/>
+            <a:off x="548640" y="2095691"/>
             <a:ext cx="5410048" cy="2895219"/>
           </a:xfrm>
           <a:prstGeom prst="roundRect">
@@ -10261,7 +10261,7 @@
         </p:nvSpPr>
         <p:spPr>
           <a:xfrm>
-            <a:off x="548640" y="1645920"/>
+            <a:off x="548640" y="2095691"/>
             <a:ext cx="5410048" cy="73152"/>
           </a:xfrm>
           <a:prstGeom prst="rect">
@@ -10281,7 +10281,7 @@
         </p:nvSpPr>
         <p:spPr>
           <a:xfrm>
-            <a:off x="777240" y="1920240"/>
+            <a:off x="777240" y="2370011"/>
             <a:ext cx="457200" cy="457200"/>
           </a:xfrm>
           <a:prstGeom prst="roundRect">
@@ -10303,7 +10303,7 @@
         </p:nvSpPr>
         <p:spPr>
           <a:xfrm>
-            <a:off x="1371600" y="1920240"/>
+            <a:off x="1371600" y="2370011"/>
             <a:ext cx="4404208" cy="457200"/>
           </a:xfrm>
           <a:prstGeom prst="rect">
@@ -10339,7 +10339,7 @@
         </p:nvSpPr>
         <p:spPr>
           <a:xfrm>
-            <a:off x="777240" y="2560320"/>
+            <a:off x="777240" y="3010091"/>
             <a:ext cx="4952848" cy="1843659"/>
           </a:xfrm>
           <a:prstGeom prst="rect">
@@ -10434,7 +10434,7 @@
         </p:nvSpPr>
         <p:spPr>
           <a:xfrm>
-            <a:off x="6233008" y="1645920"/>
+            <a:off x="6233008" y="2095691"/>
             <a:ext cx="5410048" cy="2895219"/>
           </a:xfrm>
           <a:prstGeom prst="roundRect">
@@ -10468,7 +10468,7 @@
         </p:nvSpPr>
         <p:spPr>
           <a:xfrm>
-            <a:off x="6233008" y="1645920"/>
+            <a:off x="6233008" y="2095691"/>
             <a:ext cx="5410048" cy="73152"/>
           </a:xfrm>
           <a:prstGeom prst="rect">
@@ -10488,7 +10488,7 @@
         </p:nvSpPr>
         <p:spPr>
           <a:xfrm>
-            <a:off x="6461608" y="1920240"/>
+            <a:off x="6461608" y="2370011"/>
             <a:ext cx="457200" cy="457200"/>
           </a:xfrm>
           <a:prstGeom prst="roundRect">
@@ -10510,7 +10510,7 @@
         </p:nvSpPr>
         <p:spPr>
           <a:xfrm>
-            <a:off x="7055968" y="1920240"/>
+            <a:off x="7055968" y="2370011"/>
             <a:ext cx="4404208" cy="457200"/>
           </a:xfrm>
           <a:prstGeom prst="rect">
@@ -10546,7 +10546,7 @@
         </p:nvSpPr>
         <p:spPr>
           <a:xfrm>
-            <a:off x="6461608" y="2560320"/>
+            <a:off x="6461608" y="3010091"/>
             <a:ext cx="4952848" cy="1843659"/>
           </a:xfrm>
           <a:prstGeom prst="rect">
@@ -10676,7 +10676,7 @@
         </p:nvSpPr>
         <p:spPr>
           <a:xfrm>
-            <a:off x="548640" y="4705731"/>
+            <a:off x="548640" y="5155502"/>
             <a:ext cx="11094415" cy="566928"/>
           </a:xfrm>
           <a:prstGeom prst="roundRect">
@@ -10698,7 +10698,7 @@
         </p:nvSpPr>
         <p:spPr>
           <a:xfrm>
-            <a:off x="1207008" y="4705731"/>
+            <a:off x="1207008" y="5155502"/>
             <a:ext cx="10225735" cy="566928"/>
           </a:xfrm>
           <a:prstGeom prst="rect">
@@ -10785,7 +10785,7 @@
         </p:blipFill>
         <p:spPr>
           <a:xfrm>
-            <a:off x="877824" y="2020824"/>
+            <a:off x="877824" y="2470595"/>
             <a:ext cx="256032" cy="256032"/>
           </a:xfrm>
           <a:prstGeom prst="rect">
@@ -10809,7 +10809,7 @@
         </p:blipFill>
         <p:spPr>
           <a:xfrm>
-            <a:off x="6562192" y="2020824"/>
+            <a:off x="6562192" y="2470595"/>
             <a:ext cx="256032" cy="256032"/>
           </a:xfrm>
           <a:prstGeom prst="rect">
@@ -10833,7 +10833,7 @@
         </p:blipFill>
         <p:spPr>
           <a:xfrm>
-            <a:off x="749808" y="4833747"/>
+            <a:off x="749808" y="5283518"/>
             <a:ext cx="310896" cy="310896"/>
           </a:xfrm>
           <a:prstGeom prst="rect">
@@ -14115,7 +14115,7 @@
         </p:nvSpPr>
         <p:spPr>
           <a:xfrm>
-            <a:off x="548640" y="1645920"/>
+            <a:off x="548640" y="2466975"/>
             <a:ext cx="5432908" cy="2134362"/>
           </a:xfrm>
           <a:prstGeom prst="roundRect">
@@ -14149,7 +14149,7 @@
         </p:nvSpPr>
         <p:spPr>
           <a:xfrm>
-            <a:off x="749808" y="1847088"/>
+            <a:off x="749808" y="2668143"/>
             <a:ext cx="457200" cy="457200"/>
           </a:xfrm>
           <a:prstGeom prst="roundRect">
@@ -14171,7 +14171,7 @@
         </p:nvSpPr>
         <p:spPr>
           <a:xfrm>
-            <a:off x="749808" y="2450592"/>
+            <a:off x="749808" y="3271647"/>
             <a:ext cx="5030572" cy="1219962"/>
           </a:xfrm>
           <a:prstGeom prst="rect">
@@ -14259,7 +14259,7 @@
         </p:nvSpPr>
         <p:spPr>
           <a:xfrm>
-            <a:off x="6210148" y="1645920"/>
+            <a:off x="6210148" y="2466975"/>
             <a:ext cx="5432908" cy="2134362"/>
           </a:xfrm>
           <a:prstGeom prst="roundRect">
@@ -14293,7 +14293,7 @@
         </p:nvSpPr>
         <p:spPr>
           <a:xfrm>
-            <a:off x="6411316" y="1847088"/>
+            <a:off x="6411316" y="2668143"/>
             <a:ext cx="457200" cy="457200"/>
           </a:xfrm>
           <a:prstGeom prst="roundRect">
@@ -14315,7 +14315,7 @@
         </p:nvSpPr>
         <p:spPr>
           <a:xfrm>
-            <a:off x="6411316" y="2450592"/>
+            <a:off x="6411316" y="3271647"/>
             <a:ext cx="5030572" cy="1219962"/>
           </a:xfrm>
           <a:prstGeom prst="rect">
@@ -14400,7 +14400,7 @@
         </p:nvSpPr>
         <p:spPr>
           <a:xfrm>
-            <a:off x="548640" y="3963162"/>
+            <a:off x="548640" y="4784217"/>
             <a:ext cx="11094415" cy="566928"/>
           </a:xfrm>
           <a:prstGeom prst="roundRect">
@@ -14422,7 +14422,7 @@
         </p:nvSpPr>
         <p:spPr>
           <a:xfrm>
-            <a:off x="1207008" y="3963162"/>
+            <a:off x="1207008" y="4784217"/>
             <a:ext cx="10225735" cy="566928"/>
           </a:xfrm>
           <a:prstGeom prst="rect">
@@ -14474,7 +14474,7 @@
         </p:blipFill>
         <p:spPr>
           <a:xfrm>
-            <a:off x="850392" y="1947672"/>
+            <a:off x="850392" y="2768727"/>
             <a:ext cx="256032" cy="256032"/>
           </a:xfrm>
           <a:prstGeom prst="rect">
@@ -14498,7 +14498,7 @@
         </p:blipFill>
         <p:spPr>
           <a:xfrm>
-            <a:off x="6511900" y="1947672"/>
+            <a:off x="6511900" y="2768727"/>
             <a:ext cx="256032" cy="256032"/>
           </a:xfrm>
           <a:prstGeom prst="rect">
@@ -14522,7 +14522,7 @@
         </p:blipFill>
         <p:spPr>
           <a:xfrm>
-            <a:off x="749808" y="4091178"/>
+            <a:off x="749808" y="4912233"/>
             <a:ext cx="310896" cy="310896"/>
           </a:xfrm>
           <a:prstGeom prst="rect">
@@ -15381,7 +15381,7 @@
         </p:blipFill>
         <p:spPr>
           <a:xfrm>
-            <a:off x="822960" y="3886200"/>
+            <a:off x="6355080" y="2926080"/>
             <a:ext cx="256032" cy="256032"/>
           </a:xfrm>
           <a:prstGeom prst="rect">
@@ -15405,7 +15405,7 @@
         </p:blipFill>
         <p:spPr>
           <a:xfrm>
-            <a:off x="6355080" y="2926080"/>
+            <a:off x="822960" y="3886200"/>
             <a:ext cx="256032" cy="256032"/>
           </a:xfrm>
           <a:prstGeom prst="rect">
@@ -17017,7 +17017,7 @@
         </p:blipFill>
         <p:spPr>
           <a:xfrm>
-            <a:off x="2636444" y="1847088"/>
+            <a:off x="5455768" y="1847088"/>
             <a:ext cx="347472" cy="347472"/>
           </a:xfrm>
           <a:prstGeom prst="rect">
@@ -17041,7 +17041,7 @@
         </p:blipFill>
         <p:spPr>
           <a:xfrm>
-            <a:off x="5455768" y="1847088"/>
+            <a:off x="2636444" y="1847088"/>
             <a:ext cx="347472" cy="347472"/>
           </a:xfrm>
           <a:prstGeom prst="rect">
@@ -17371,7 +17371,7 @@
         </p:nvSpPr>
         <p:spPr>
           <a:xfrm>
-            <a:off x="548640" y="1645920"/>
+            <a:off x="548640" y="2359660"/>
             <a:ext cx="3545738" cy="2348992"/>
           </a:xfrm>
           <a:prstGeom prst="roundRect">
@@ -17405,7 +17405,7 @@
         </p:nvSpPr>
         <p:spPr>
           <a:xfrm>
-            <a:off x="749808" y="1847088"/>
+            <a:off x="749808" y="2560828"/>
             <a:ext cx="457200" cy="457200"/>
           </a:xfrm>
           <a:prstGeom prst="roundRect">
@@ -17427,7 +17427,7 @@
         </p:nvSpPr>
         <p:spPr>
           <a:xfrm>
-            <a:off x="749808" y="2450592"/>
+            <a:off x="749808" y="3164332"/>
             <a:ext cx="3143402" cy="1434592"/>
           </a:xfrm>
           <a:prstGeom prst="rect">
@@ -17496,7 +17496,7 @@
         </p:nvSpPr>
         <p:spPr>
           <a:xfrm>
-            <a:off x="4322978" y="1645920"/>
+            <a:off x="4322978" y="2359660"/>
             <a:ext cx="3545738" cy="2348992"/>
           </a:xfrm>
           <a:prstGeom prst="roundRect">
@@ -17530,7 +17530,7 @@
         </p:nvSpPr>
         <p:spPr>
           <a:xfrm>
-            <a:off x="4524146" y="1847088"/>
+            <a:off x="4524146" y="2560828"/>
             <a:ext cx="457200" cy="457200"/>
           </a:xfrm>
           <a:prstGeom prst="roundRect">
@@ -17552,7 +17552,7 @@
         </p:nvSpPr>
         <p:spPr>
           <a:xfrm>
-            <a:off x="4524146" y="2450592"/>
+            <a:off x="4524146" y="3164332"/>
             <a:ext cx="3143402" cy="1434592"/>
           </a:xfrm>
           <a:prstGeom prst="rect">
@@ -17605,7 +17605,7 @@
         </p:nvSpPr>
         <p:spPr>
           <a:xfrm>
-            <a:off x="8097317" y="1645920"/>
+            <a:off x="8097317" y="2359660"/>
             <a:ext cx="3545738" cy="2348992"/>
           </a:xfrm>
           <a:prstGeom prst="roundRect">
@@ -17639,7 +17639,7 @@
         </p:nvSpPr>
         <p:spPr>
           <a:xfrm>
-            <a:off x="8298485" y="1847088"/>
+            <a:off x="8298485" y="2560828"/>
             <a:ext cx="457200" cy="457200"/>
           </a:xfrm>
           <a:prstGeom prst="roundRect">
@@ -17661,7 +17661,7 @@
         </p:nvSpPr>
         <p:spPr>
           <a:xfrm>
-            <a:off x="8298485" y="2450592"/>
+            <a:off x="8298485" y="3164332"/>
             <a:ext cx="3143402" cy="1434592"/>
           </a:xfrm>
           <a:prstGeom prst="rect">
@@ -17746,7 +17746,7 @@
         </p:nvSpPr>
         <p:spPr>
           <a:xfrm>
-            <a:off x="548640" y="4177792"/>
+            <a:off x="548640" y="4891532"/>
             <a:ext cx="11094415" cy="566928"/>
           </a:xfrm>
           <a:prstGeom prst="roundRect">
@@ -17768,7 +17768,7 @@
         </p:nvSpPr>
         <p:spPr>
           <a:xfrm>
-            <a:off x="1207008" y="4177792"/>
+            <a:off x="1207008" y="4891532"/>
             <a:ext cx="10225735" cy="566928"/>
           </a:xfrm>
           <a:prstGeom prst="rect">
@@ -17820,7 +17820,7 @@
         </p:blipFill>
         <p:spPr>
           <a:xfrm>
-            <a:off x="4624730" y="1947672"/>
+            <a:off x="850392" y="2661412"/>
             <a:ext cx="256032" cy="256032"/>
           </a:xfrm>
           <a:prstGeom prst="rect">
@@ -17844,7 +17844,7 @@
         </p:blipFill>
         <p:spPr>
           <a:xfrm>
-            <a:off x="850392" y="1947672"/>
+            <a:off x="4624730" y="2661412"/>
             <a:ext cx="256032" cy="256032"/>
           </a:xfrm>
           <a:prstGeom prst="rect">
@@ -17868,8 +17868,8 @@
         </p:blipFill>
         <p:spPr>
           <a:xfrm>
-            <a:off x="749808" y="4305808"/>
-            <a:ext cx="310896" cy="310896"/>
+            <a:off x="8399069" y="2661412"/>
+            <a:ext cx="256032" cy="256032"/>
           </a:xfrm>
           <a:prstGeom prst="rect">
             <a:avLst/>
@@ -17892,8 +17892,8 @@
         </p:blipFill>
         <p:spPr>
           <a:xfrm>
-            <a:off x="8399069" y="1947672"/>
-            <a:ext cx="256032" cy="256032"/>
+            <a:off x="749808" y="5019548"/>
+            <a:ext cx="310896" cy="310896"/>
           </a:xfrm>
           <a:prstGeom prst="rect">
             <a:avLst/>
@@ -24993,7 +24993,7 @@
         </p:nvSpPr>
         <p:spPr>
           <a:xfrm>
-            <a:off x="548640" y="1645920"/>
+            <a:off x="548640" y="1908048"/>
             <a:ext cx="5432908" cy="1886712"/>
           </a:xfrm>
           <a:prstGeom prst="roundRect">
@@ -25027,7 +25027,7 @@
         </p:nvSpPr>
         <p:spPr>
           <a:xfrm>
-            <a:off x="749808" y="1847088"/>
+            <a:off x="749808" y="2109216"/>
             <a:ext cx="457200" cy="457200"/>
           </a:xfrm>
           <a:prstGeom prst="roundRect">
@@ -25049,7 +25049,7 @@
         </p:nvSpPr>
         <p:spPr>
           <a:xfrm>
-            <a:off x="749808" y="2450592"/>
+            <a:off x="749808" y="2712720"/>
             <a:ext cx="5030572" cy="972312"/>
           </a:xfrm>
           <a:prstGeom prst="rect">
@@ -25121,7 +25121,7 @@
         </p:nvSpPr>
         <p:spPr>
           <a:xfrm>
-            <a:off x="6210148" y="1645920"/>
+            <a:off x="6210148" y="1908048"/>
             <a:ext cx="5432908" cy="1886712"/>
           </a:xfrm>
           <a:prstGeom prst="roundRect">
@@ -25155,7 +25155,7 @@
         </p:nvSpPr>
         <p:spPr>
           <a:xfrm>
-            <a:off x="6411316" y="1847088"/>
+            <a:off x="6411316" y="2109216"/>
             <a:ext cx="457200" cy="457200"/>
           </a:xfrm>
           <a:prstGeom prst="roundRect">
@@ -25177,7 +25177,7 @@
         </p:nvSpPr>
         <p:spPr>
           <a:xfrm>
-            <a:off x="6411316" y="2450592"/>
+            <a:off x="6411316" y="2712720"/>
             <a:ext cx="5030572" cy="972312"/>
           </a:xfrm>
           <a:prstGeom prst="rect">
@@ -25241,7 +25241,7 @@
         </p:nvSpPr>
         <p:spPr>
           <a:xfrm>
-            <a:off x="548640" y="3761232"/>
+            <a:off x="548640" y="4023360"/>
             <a:ext cx="5432908" cy="1886712"/>
           </a:xfrm>
           <a:prstGeom prst="roundRect">
@@ -25275,7 +25275,7 @@
         </p:nvSpPr>
         <p:spPr>
           <a:xfrm>
-            <a:off x="749808" y="3962400"/>
+            <a:off x="749808" y="4224528"/>
             <a:ext cx="457200" cy="457200"/>
           </a:xfrm>
           <a:prstGeom prst="roundRect">
@@ -25297,7 +25297,7 @@
         </p:nvSpPr>
         <p:spPr>
           <a:xfrm>
-            <a:off x="749808" y="4565904"/>
+            <a:off x="749808" y="4828032"/>
             <a:ext cx="5030572" cy="972312"/>
           </a:xfrm>
           <a:prstGeom prst="rect">
@@ -25377,7 +25377,7 @@
         </p:nvSpPr>
         <p:spPr>
           <a:xfrm>
-            <a:off x="6210148" y="3761232"/>
+            <a:off x="6210148" y="4023360"/>
             <a:ext cx="5432908" cy="1886712"/>
           </a:xfrm>
           <a:prstGeom prst="roundRect">
@@ -25411,7 +25411,7 @@
         </p:nvSpPr>
         <p:spPr>
           <a:xfrm>
-            <a:off x="6411316" y="3962400"/>
+            <a:off x="6411316" y="4224528"/>
             <a:ext cx="457200" cy="457200"/>
           </a:xfrm>
           <a:prstGeom prst="roundRect">
@@ -25433,7 +25433,7 @@
         </p:nvSpPr>
         <p:spPr>
           <a:xfrm>
-            <a:off x="6411316" y="4565904"/>
+            <a:off x="6411316" y="4828032"/>
             <a:ext cx="5030572" cy="972312"/>
           </a:xfrm>
           <a:prstGeom prst="rect">
@@ -25529,7 +25529,7 @@
         </p:blipFill>
         <p:spPr>
           <a:xfrm>
-            <a:off x="850392" y="1947672"/>
+            <a:off x="850392" y="2209800"/>
             <a:ext cx="256032" cy="256032"/>
           </a:xfrm>
           <a:prstGeom prst="rect">
@@ -25553,7 +25553,7 @@
         </p:blipFill>
         <p:spPr>
           <a:xfrm>
-            <a:off x="6511900" y="1947672"/>
+            <a:off x="6511900" y="2209800"/>
             <a:ext cx="256032" cy="256032"/>
           </a:xfrm>
           <a:prstGeom prst="rect">
@@ -25577,7 +25577,7 @@
         </p:blipFill>
         <p:spPr>
           <a:xfrm>
-            <a:off x="850392" y="4062984"/>
+            <a:off x="6511900" y="4325112"/>
             <a:ext cx="256032" cy="256032"/>
           </a:xfrm>
           <a:prstGeom prst="rect">
@@ -25601,7 +25601,7 @@
         </p:blipFill>
         <p:spPr>
           <a:xfrm>
-            <a:off x="6511900" y="4062984"/>
+            <a:off x="850392" y="4325112"/>
             <a:ext cx="256032" cy="256032"/>
           </a:xfrm>
           <a:prstGeom prst="rect">
